--- a/templates/AIWeeklyReport_format.pptx
+++ b/templates/AIWeeklyReport_format.pptx
@@ -5,10 +5,10 @@
     <p:sldMasterId id="2147483648" r:id="rId1"/>
   </p:sldMasterIdLst>
   <p:sldIdLst>
-    <p:sldId id="263" r:id="rId3"/>
+    <p:sldId id="263" r:id="rId2"/>
   </p:sldIdLst>
   <p:sldSz cx="6858000" cy="9906000" type="A4"/>
-  <p:notesSz cx="6735445" cy="9865995"/>
+  <p:notesSz cx="6735763" cy="9866313"/>
   <p:defaultTextStyle>
     <a:defPPr>
       <a:defRPr lang="en-US"/>
@@ -104,6 +104,11 @@
       </a:defRPr>
     </a:lvl9pPr>
   </p:defaultTextStyle>
+  <p:extLst>
+    <p:ext uri="{EFAFB233-063F-42B5-8137-9DF3F51BA10A}">
+      <p15:sldGuideLst xmlns:p15="http://schemas.microsoft.com/office/powerpoint/2012/main"/>
+    </p:ext>
+  </p:extLst>
 </p:presentation>
 </file>
 
@@ -238,6 +243,7 @@
           <a:p>
             <a:fld id="{E4C8C4E1-84EF-43CE-9C5D-23647B873D99}" type="datetimeFigureOut">
               <a:rPr lang="ko-KR" altLang="en-US" smtClean="0"/>
+              <a:t>2026-05-28</a:t>
             </a:fld>
             <a:endParaRPr lang="ko-KR" altLang="en-US" dirty="0"/>
           </a:p>
@@ -279,6 +285,7 @@
           <a:p>
             <a:fld id="{F16C684E-E654-464C-8296-B1B70B3841D9}" type="slidenum">
               <a:rPr lang="ko-KR" altLang="en-US" smtClean="0"/>
+              <a:t>‹#›</a:t>
             </a:fld>
             <a:endParaRPr lang="ko-KR" altLang="en-US" dirty="0"/>
           </a:p>
@@ -352,7 +359,6 @@
               <a:rPr lang="ko-KR" altLang="en-US"/>
               <a:t>마스터 텍스트 스타일을 편집하려면 클릭</a:t>
             </a:r>
-            <a:endParaRPr lang="ko-KR" altLang="en-US"/>
           </a:p>
           <a:p>
             <a:pPr lvl="1"/>
@@ -360,7 +366,6 @@
               <a:rPr lang="ko-KR" altLang="en-US"/>
               <a:t>두 번째 수준</a:t>
             </a:r>
-            <a:endParaRPr lang="ko-KR" altLang="en-US"/>
           </a:p>
           <a:p>
             <a:pPr lvl="2"/>
@@ -368,7 +373,6 @@
               <a:rPr lang="ko-KR" altLang="en-US"/>
               <a:t>세 번째 수준</a:t>
             </a:r>
-            <a:endParaRPr lang="ko-KR" altLang="en-US"/>
           </a:p>
           <a:p>
             <a:pPr lvl="3"/>
@@ -376,7 +380,6 @@
               <a:rPr lang="ko-KR" altLang="en-US"/>
               <a:t>네 번째 수준</a:t>
             </a:r>
-            <a:endParaRPr lang="ko-KR" altLang="en-US"/>
           </a:p>
           <a:p>
             <a:pPr lvl="4"/>
@@ -405,6 +408,7 @@
           <a:p>
             <a:fld id="{E4C8C4E1-84EF-43CE-9C5D-23647B873D99}" type="datetimeFigureOut">
               <a:rPr lang="ko-KR" altLang="en-US" smtClean="0"/>
+              <a:t>2026-05-28</a:t>
             </a:fld>
             <a:endParaRPr lang="ko-KR" altLang="en-US" dirty="0"/>
           </a:p>
@@ -446,6 +450,7 @@
           <a:p>
             <a:fld id="{F16C684E-E654-464C-8296-B1B70B3841D9}" type="slidenum">
               <a:rPr lang="ko-KR" altLang="en-US" smtClean="0"/>
+              <a:t>‹#›</a:t>
             </a:fld>
             <a:endParaRPr lang="ko-KR" altLang="en-US" dirty="0"/>
           </a:p>
@@ -529,7 +534,6 @@
               <a:rPr lang="ko-KR" altLang="en-US"/>
               <a:t>마스터 텍스트 스타일을 편집하려면 클릭</a:t>
             </a:r>
-            <a:endParaRPr lang="ko-KR" altLang="en-US"/>
           </a:p>
           <a:p>
             <a:pPr lvl="1"/>
@@ -537,7 +541,6 @@
               <a:rPr lang="ko-KR" altLang="en-US"/>
               <a:t>두 번째 수준</a:t>
             </a:r>
-            <a:endParaRPr lang="ko-KR" altLang="en-US"/>
           </a:p>
           <a:p>
             <a:pPr lvl="2"/>
@@ -545,7 +548,6 @@
               <a:rPr lang="ko-KR" altLang="en-US"/>
               <a:t>세 번째 수준</a:t>
             </a:r>
-            <a:endParaRPr lang="ko-KR" altLang="en-US"/>
           </a:p>
           <a:p>
             <a:pPr lvl="3"/>
@@ -553,7 +555,6 @@
               <a:rPr lang="ko-KR" altLang="en-US"/>
               <a:t>네 번째 수준</a:t>
             </a:r>
-            <a:endParaRPr lang="ko-KR" altLang="en-US"/>
           </a:p>
           <a:p>
             <a:pPr lvl="4"/>
@@ -582,6 +583,7 @@
           <a:p>
             <a:fld id="{E4C8C4E1-84EF-43CE-9C5D-23647B873D99}" type="datetimeFigureOut">
               <a:rPr lang="ko-KR" altLang="en-US" smtClean="0"/>
+              <a:t>2026-05-28</a:t>
             </a:fld>
             <a:endParaRPr lang="ko-KR" altLang="en-US" dirty="0"/>
           </a:p>
@@ -623,6 +625,7 @@
           <a:p>
             <a:fld id="{F16C684E-E654-464C-8296-B1B70B3841D9}" type="slidenum">
               <a:rPr lang="ko-KR" altLang="en-US" smtClean="0"/>
+              <a:t>‹#›</a:t>
             </a:fld>
             <a:endParaRPr lang="ko-KR" altLang="en-US" dirty="0"/>
           </a:p>
@@ -696,7 +699,6 @@
               <a:rPr lang="ko-KR" altLang="en-US"/>
               <a:t>마스터 텍스트 스타일을 편집하려면 클릭</a:t>
             </a:r>
-            <a:endParaRPr lang="ko-KR" altLang="en-US"/>
           </a:p>
           <a:p>
             <a:pPr lvl="1"/>
@@ -704,7 +706,6 @@
               <a:rPr lang="ko-KR" altLang="en-US"/>
               <a:t>두 번째 수준</a:t>
             </a:r>
-            <a:endParaRPr lang="ko-KR" altLang="en-US"/>
           </a:p>
           <a:p>
             <a:pPr lvl="2"/>
@@ -712,7 +713,6 @@
               <a:rPr lang="ko-KR" altLang="en-US"/>
               <a:t>세 번째 수준</a:t>
             </a:r>
-            <a:endParaRPr lang="ko-KR" altLang="en-US"/>
           </a:p>
           <a:p>
             <a:pPr lvl="3"/>
@@ -720,7 +720,6 @@
               <a:rPr lang="ko-KR" altLang="en-US"/>
               <a:t>네 번째 수준</a:t>
             </a:r>
-            <a:endParaRPr lang="ko-KR" altLang="en-US"/>
           </a:p>
           <a:p>
             <a:pPr lvl="4"/>
@@ -749,6 +748,7 @@
           <a:p>
             <a:fld id="{E4C8C4E1-84EF-43CE-9C5D-23647B873D99}" type="datetimeFigureOut">
               <a:rPr lang="ko-KR" altLang="en-US" smtClean="0"/>
+              <a:t>2026-05-28</a:t>
             </a:fld>
             <a:endParaRPr lang="ko-KR" altLang="en-US" dirty="0"/>
           </a:p>
@@ -790,6 +790,7 @@
           <a:p>
             <a:fld id="{F16C684E-E654-464C-8296-B1B70B3841D9}" type="slidenum">
               <a:rPr lang="ko-KR" altLang="en-US" smtClean="0"/>
+              <a:t>‹#›</a:t>
             </a:fld>
             <a:endParaRPr lang="ko-KR" altLang="en-US" dirty="0"/>
           </a:p>
@@ -966,7 +967,6 @@
               <a:rPr lang="ko-KR" altLang="en-US"/>
               <a:t>마스터 텍스트 스타일을 편집하려면 클릭</a:t>
             </a:r>
-            <a:endParaRPr lang="ko-KR" altLang="en-US"/>
           </a:p>
         </p:txBody>
       </p:sp>
@@ -987,6 +987,7 @@
           <a:p>
             <a:fld id="{E4C8C4E1-84EF-43CE-9C5D-23647B873D99}" type="datetimeFigureOut">
               <a:rPr lang="ko-KR" altLang="en-US" smtClean="0"/>
+              <a:t>2026-05-28</a:t>
             </a:fld>
             <a:endParaRPr lang="ko-KR" altLang="en-US" dirty="0"/>
           </a:p>
@@ -1028,6 +1029,7 @@
           <a:p>
             <a:fld id="{F16C684E-E654-464C-8296-B1B70B3841D9}" type="slidenum">
               <a:rPr lang="ko-KR" altLang="en-US" smtClean="0"/>
+              <a:t>‹#›</a:t>
             </a:fld>
             <a:endParaRPr lang="ko-KR" altLang="en-US" dirty="0"/>
           </a:p>
@@ -1106,7 +1108,6 @@
               <a:rPr lang="ko-KR" altLang="en-US"/>
               <a:t>마스터 텍스트 스타일을 편집하려면 클릭</a:t>
             </a:r>
-            <a:endParaRPr lang="ko-KR" altLang="en-US"/>
           </a:p>
           <a:p>
             <a:pPr lvl="1"/>
@@ -1114,7 +1115,6 @@
               <a:rPr lang="ko-KR" altLang="en-US"/>
               <a:t>두 번째 수준</a:t>
             </a:r>
-            <a:endParaRPr lang="ko-KR" altLang="en-US"/>
           </a:p>
           <a:p>
             <a:pPr lvl="2"/>
@@ -1122,7 +1122,6 @@
               <a:rPr lang="ko-KR" altLang="en-US"/>
               <a:t>세 번째 수준</a:t>
             </a:r>
-            <a:endParaRPr lang="ko-KR" altLang="en-US"/>
           </a:p>
           <a:p>
             <a:pPr lvl="3"/>
@@ -1130,7 +1129,6 @@
               <a:rPr lang="ko-KR" altLang="en-US"/>
               <a:t>네 번째 수준</a:t>
             </a:r>
-            <a:endParaRPr lang="ko-KR" altLang="en-US"/>
           </a:p>
           <a:p>
             <a:pPr lvl="4"/>
@@ -1167,7 +1165,6 @@
               <a:rPr lang="ko-KR" altLang="en-US"/>
               <a:t>마스터 텍스트 스타일을 편집하려면 클릭</a:t>
             </a:r>
-            <a:endParaRPr lang="ko-KR" altLang="en-US"/>
           </a:p>
           <a:p>
             <a:pPr lvl="1"/>
@@ -1175,7 +1172,6 @@
               <a:rPr lang="ko-KR" altLang="en-US"/>
               <a:t>두 번째 수준</a:t>
             </a:r>
-            <a:endParaRPr lang="ko-KR" altLang="en-US"/>
           </a:p>
           <a:p>
             <a:pPr lvl="2"/>
@@ -1183,7 +1179,6 @@
               <a:rPr lang="ko-KR" altLang="en-US"/>
               <a:t>세 번째 수준</a:t>
             </a:r>
-            <a:endParaRPr lang="ko-KR" altLang="en-US"/>
           </a:p>
           <a:p>
             <a:pPr lvl="3"/>
@@ -1191,7 +1186,6 @@
               <a:rPr lang="ko-KR" altLang="en-US"/>
               <a:t>네 번째 수준</a:t>
             </a:r>
-            <a:endParaRPr lang="ko-KR" altLang="en-US"/>
           </a:p>
           <a:p>
             <a:pPr lvl="4"/>
@@ -1220,6 +1214,7 @@
           <a:p>
             <a:fld id="{E4C8C4E1-84EF-43CE-9C5D-23647B873D99}" type="datetimeFigureOut">
               <a:rPr lang="ko-KR" altLang="en-US" smtClean="0"/>
+              <a:t>2026-05-28</a:t>
             </a:fld>
             <a:endParaRPr lang="ko-KR" altLang="en-US" dirty="0"/>
           </a:p>
@@ -1261,6 +1256,7 @@
           <a:p>
             <a:fld id="{F16C684E-E654-464C-8296-B1B70B3841D9}" type="slidenum">
               <a:rPr lang="ko-KR" altLang="en-US" smtClean="0"/>
+              <a:t>‹#›</a:t>
             </a:fld>
             <a:endParaRPr lang="ko-KR" altLang="en-US" dirty="0"/>
           </a:p>
@@ -1381,7 +1377,6 @@
               <a:rPr lang="ko-KR" altLang="en-US"/>
               <a:t>마스터 텍스트 스타일을 편집하려면 클릭</a:t>
             </a:r>
-            <a:endParaRPr lang="ko-KR" altLang="en-US"/>
           </a:p>
         </p:txBody>
       </p:sp>
@@ -1410,7 +1405,6 @@
               <a:rPr lang="ko-KR" altLang="en-US"/>
               <a:t>마스터 텍스트 스타일을 편집하려면 클릭</a:t>
             </a:r>
-            <a:endParaRPr lang="ko-KR" altLang="en-US"/>
           </a:p>
           <a:p>
             <a:pPr lvl="1"/>
@@ -1418,7 +1412,6 @@
               <a:rPr lang="ko-KR" altLang="en-US"/>
               <a:t>두 번째 수준</a:t>
             </a:r>
-            <a:endParaRPr lang="ko-KR" altLang="en-US"/>
           </a:p>
           <a:p>
             <a:pPr lvl="2"/>
@@ -1426,7 +1419,6 @@
               <a:rPr lang="ko-KR" altLang="en-US"/>
               <a:t>세 번째 수준</a:t>
             </a:r>
-            <a:endParaRPr lang="ko-KR" altLang="en-US"/>
           </a:p>
           <a:p>
             <a:pPr lvl="3"/>
@@ -1434,7 +1426,6 @@
               <a:rPr lang="ko-KR" altLang="en-US"/>
               <a:t>네 번째 수준</a:t>
             </a:r>
-            <a:endParaRPr lang="ko-KR" altLang="en-US"/>
           </a:p>
           <a:p>
             <a:pPr lvl="4"/>
@@ -1508,7 +1499,6 @@
               <a:rPr lang="ko-KR" altLang="en-US"/>
               <a:t>마스터 텍스트 스타일을 편집하려면 클릭</a:t>
             </a:r>
-            <a:endParaRPr lang="ko-KR" altLang="en-US"/>
           </a:p>
         </p:txBody>
       </p:sp>
@@ -1537,7 +1527,6 @@
               <a:rPr lang="ko-KR" altLang="en-US"/>
               <a:t>마스터 텍스트 스타일을 편집하려면 클릭</a:t>
             </a:r>
-            <a:endParaRPr lang="ko-KR" altLang="en-US"/>
           </a:p>
           <a:p>
             <a:pPr lvl="1"/>
@@ -1545,7 +1534,6 @@
               <a:rPr lang="ko-KR" altLang="en-US"/>
               <a:t>두 번째 수준</a:t>
             </a:r>
-            <a:endParaRPr lang="ko-KR" altLang="en-US"/>
           </a:p>
           <a:p>
             <a:pPr lvl="2"/>
@@ -1553,7 +1541,6 @@
               <a:rPr lang="ko-KR" altLang="en-US"/>
               <a:t>세 번째 수준</a:t>
             </a:r>
-            <a:endParaRPr lang="ko-KR" altLang="en-US"/>
           </a:p>
           <a:p>
             <a:pPr lvl="3"/>
@@ -1561,7 +1548,6 @@
               <a:rPr lang="ko-KR" altLang="en-US"/>
               <a:t>네 번째 수준</a:t>
             </a:r>
-            <a:endParaRPr lang="ko-KR" altLang="en-US"/>
           </a:p>
           <a:p>
             <a:pPr lvl="4"/>
@@ -1590,6 +1576,7 @@
           <a:p>
             <a:fld id="{E4C8C4E1-84EF-43CE-9C5D-23647B873D99}" type="datetimeFigureOut">
               <a:rPr lang="ko-KR" altLang="en-US" smtClean="0"/>
+              <a:t>2026-05-28</a:t>
             </a:fld>
             <a:endParaRPr lang="ko-KR" altLang="en-US" dirty="0"/>
           </a:p>
@@ -1631,6 +1618,7 @@
           <a:p>
             <a:fld id="{F16C684E-E654-464C-8296-B1B70B3841D9}" type="slidenum">
               <a:rPr lang="ko-KR" altLang="en-US" smtClean="0"/>
+              <a:t>‹#›</a:t>
             </a:fld>
             <a:endParaRPr lang="ko-KR" altLang="en-US" dirty="0"/>
           </a:p>
@@ -1701,6 +1689,7 @@
           <a:p>
             <a:fld id="{E4C8C4E1-84EF-43CE-9C5D-23647B873D99}" type="datetimeFigureOut">
               <a:rPr lang="ko-KR" altLang="en-US" smtClean="0"/>
+              <a:t>2026-05-28</a:t>
             </a:fld>
             <a:endParaRPr lang="ko-KR" altLang="en-US" dirty="0"/>
           </a:p>
@@ -1742,6 +1731,7 @@
           <a:p>
             <a:fld id="{F16C684E-E654-464C-8296-B1B70B3841D9}" type="slidenum">
               <a:rPr lang="ko-KR" altLang="en-US" smtClean="0"/>
+              <a:t>‹#›</a:t>
             </a:fld>
             <a:endParaRPr lang="ko-KR" altLang="en-US" dirty="0"/>
           </a:p>
@@ -1789,6 +1779,7 @@
           <a:p>
             <a:fld id="{E4C8C4E1-84EF-43CE-9C5D-23647B873D99}" type="datetimeFigureOut">
               <a:rPr lang="ko-KR" altLang="en-US" smtClean="0"/>
+              <a:t>2026-05-28</a:t>
             </a:fld>
             <a:endParaRPr lang="ko-KR" altLang="en-US" dirty="0"/>
           </a:p>
@@ -1830,6 +1821,7 @@
           <a:p>
             <a:fld id="{F16C684E-E654-464C-8296-B1B70B3841D9}" type="slidenum">
               <a:rPr lang="ko-KR" altLang="en-US" smtClean="0"/>
+              <a:t>‹#›</a:t>
             </a:fld>
             <a:endParaRPr lang="ko-KR" altLang="en-US" dirty="0"/>
           </a:p>
@@ -1945,7 +1937,6 @@
               <a:rPr lang="ko-KR" altLang="en-US"/>
               <a:t>마스터 텍스트 스타일을 편집하려면 클릭</a:t>
             </a:r>
-            <a:endParaRPr lang="ko-KR" altLang="en-US"/>
           </a:p>
           <a:p>
             <a:pPr lvl="1"/>
@@ -1953,7 +1944,6 @@
               <a:rPr lang="ko-KR" altLang="en-US"/>
               <a:t>두 번째 수준</a:t>
             </a:r>
-            <a:endParaRPr lang="ko-KR" altLang="en-US"/>
           </a:p>
           <a:p>
             <a:pPr lvl="2"/>
@@ -1961,7 +1951,6 @@
               <a:rPr lang="ko-KR" altLang="en-US"/>
               <a:t>세 번째 수준</a:t>
             </a:r>
-            <a:endParaRPr lang="ko-KR" altLang="en-US"/>
           </a:p>
           <a:p>
             <a:pPr lvl="3"/>
@@ -1969,7 +1958,6 @@
               <a:rPr lang="ko-KR" altLang="en-US"/>
               <a:t>네 번째 수준</a:t>
             </a:r>
-            <a:endParaRPr lang="ko-KR" altLang="en-US"/>
           </a:p>
           <a:p>
             <a:pPr lvl="4"/>
@@ -2043,7 +2031,6 @@
               <a:rPr lang="ko-KR" altLang="en-US"/>
               <a:t>마스터 텍스트 스타일을 편집하려면 클릭</a:t>
             </a:r>
-            <a:endParaRPr lang="ko-KR" altLang="en-US"/>
           </a:p>
         </p:txBody>
       </p:sp>
@@ -2064,6 +2051,7 @@
           <a:p>
             <a:fld id="{E4C8C4E1-84EF-43CE-9C5D-23647B873D99}" type="datetimeFigureOut">
               <a:rPr lang="ko-KR" altLang="en-US" smtClean="0"/>
+              <a:t>2026-05-28</a:t>
             </a:fld>
             <a:endParaRPr lang="ko-KR" altLang="en-US" dirty="0"/>
           </a:p>
@@ -2105,6 +2093,7 @@
           <a:p>
             <a:fld id="{F16C684E-E654-464C-8296-B1B70B3841D9}" type="slidenum">
               <a:rPr lang="ko-KR" altLang="en-US" smtClean="0"/>
+              <a:t>‹#›</a:t>
             </a:fld>
             <a:endParaRPr lang="ko-KR" altLang="en-US" dirty="0"/>
           </a:p>
@@ -2294,7 +2283,6 @@
               <a:rPr lang="ko-KR" altLang="en-US"/>
               <a:t>마스터 텍스트 스타일을 편집하려면 클릭</a:t>
             </a:r>
-            <a:endParaRPr lang="ko-KR" altLang="en-US"/>
           </a:p>
         </p:txBody>
       </p:sp>
@@ -2315,6 +2303,7 @@
           <a:p>
             <a:fld id="{E4C8C4E1-84EF-43CE-9C5D-23647B873D99}" type="datetimeFigureOut">
               <a:rPr lang="ko-KR" altLang="en-US" smtClean="0"/>
+              <a:t>2026-05-28</a:t>
             </a:fld>
             <a:endParaRPr lang="ko-KR" altLang="en-US" dirty="0"/>
           </a:p>
@@ -2356,6 +2345,7 @@
           <a:p>
             <a:fld id="{F16C684E-E654-464C-8296-B1B70B3841D9}" type="slidenum">
               <a:rPr lang="ko-KR" altLang="en-US" smtClean="0"/>
+              <a:t>‹#›</a:t>
             </a:fld>
             <a:endParaRPr lang="ko-KR" altLang="en-US" dirty="0"/>
           </a:p>
@@ -2454,7 +2444,6 @@
               <a:rPr lang="ko-KR" altLang="en-US"/>
               <a:t>마스터 텍스트 스타일을 편집하려면 클릭</a:t>
             </a:r>
-            <a:endParaRPr lang="ko-KR" altLang="en-US"/>
           </a:p>
           <a:p>
             <a:pPr lvl="1"/>
@@ -2462,7 +2451,6 @@
               <a:rPr lang="ko-KR" altLang="en-US"/>
               <a:t>두 번째 수준</a:t>
             </a:r>
-            <a:endParaRPr lang="ko-KR" altLang="en-US"/>
           </a:p>
           <a:p>
             <a:pPr lvl="2"/>
@@ -2470,7 +2458,6 @@
               <a:rPr lang="ko-KR" altLang="en-US"/>
               <a:t>세 번째 수준</a:t>
             </a:r>
-            <a:endParaRPr lang="ko-KR" altLang="en-US"/>
           </a:p>
           <a:p>
             <a:pPr lvl="3"/>
@@ -2478,7 +2465,6 @@
               <a:rPr lang="ko-KR" altLang="en-US"/>
               <a:t>네 번째 수준</a:t>
             </a:r>
-            <a:endParaRPr lang="ko-KR" altLang="en-US"/>
           </a:p>
           <a:p>
             <a:pPr lvl="4"/>
@@ -2525,6 +2511,7 @@
           <a:p>
             <a:fld id="{E4C8C4E1-84EF-43CE-9C5D-23647B873D99}" type="datetimeFigureOut">
               <a:rPr lang="ko-KR" altLang="en-US" smtClean="0"/>
+              <a:t>2026-05-28</a:t>
             </a:fld>
             <a:endParaRPr lang="ko-KR" altLang="en-US" dirty="0"/>
           </a:p>
@@ -2602,6 +2589,7 @@
           <a:p>
             <a:fld id="{F16C684E-E654-464C-8296-B1B70B3841D9}" type="slidenum">
               <a:rPr lang="ko-KR" altLang="en-US" smtClean="0"/>
+              <a:t>‹#›</a:t>
             </a:fld>
             <a:endParaRPr lang="ko-KR" altLang="en-US" dirty="0"/>
           </a:p>
@@ -3125,7 +3113,7 @@
           <p:nvPr/>
         </p:nvPicPr>
         <p:blipFill rotWithShape="1">
-          <a:blip r:embed="rId1">
+          <a:blip r:embed="rId2">
             <a:extLst>
               <a:ext uri="{28A0092B-C50C-407E-A947-70E740481C1C}">
                 <a14:useLocalDpi xmlns:a14="http://schemas.microsoft.com/office/drawing/2010/main" val="0"/>
@@ -3179,7 +3167,7 @@
         <p:spPr>
           <a:xfrm>
             <a:off x="1200884" y="46513"/>
-            <a:ext cx="1920719" cy="261610"/>
+            <a:ext cx="1845377" cy="261610"/>
           </a:xfrm>
           <a:prstGeom prst="rect">
             <a:avLst/>
@@ -3210,7 +3198,27 @@
                 <a:latin typeface="한화고딕 L" panose="02020503020101020101" pitchFamily="18" charset="-127"/>
                 <a:ea typeface="한화고딕 L" panose="02020503020101020101" pitchFamily="18" charset="-127"/>
               </a:rPr>
-              <a:t>14</a:t>
+              <a:t>(</a:t>
+            </a:r>
+            <a:r>
+              <a:rPr lang="ko-KR" altLang="en-US" sz="1100" dirty="0">
+                <a:solidFill>
+                  <a:srgbClr val="6C6A67"/>
+                </a:solidFill>
+                <a:latin typeface="한화고딕 L" panose="02020503020101020101" pitchFamily="18" charset="-127"/>
+                <a:ea typeface="한화고딕 L" panose="02020503020101020101" pitchFamily="18" charset="-127"/>
+              </a:rPr>
+              <a:t>호수입력</a:t>
+            </a:r>
+            <a:r>
+              <a:rPr lang="en-US" altLang="ko-KR" sz="1100" dirty="0">
+                <a:solidFill>
+                  <a:srgbClr val="6C6A67"/>
+                </a:solidFill>
+                <a:latin typeface="한화고딕 L" panose="02020503020101020101" pitchFamily="18" charset="-127"/>
+                <a:ea typeface="한화고딕 L" panose="02020503020101020101" pitchFamily="18" charset="-127"/>
+              </a:rPr>
+              <a:t>)</a:t>
             </a:r>
             <a:r>
               <a:rPr lang="ko-KR" altLang="en-US" sz="1100" dirty="0">
@@ -3240,7 +3248,7 @@
                 <a:latin typeface="한화고딕 L" panose="02020503020101020101" pitchFamily="18" charset="-127"/>
                 <a:ea typeface="한화고딕 L" panose="02020503020101020101" pitchFamily="18" charset="-127"/>
               </a:rPr>
-              <a:t> 2025</a:t>
+              <a:t> (</a:t>
             </a:r>
             <a:r>
               <a:rPr lang="ko-KR" altLang="en-US" sz="1100" dirty="0">
@@ -3250,7 +3258,7 @@
                 <a:latin typeface="한화고딕 L" panose="02020503020101020101" pitchFamily="18" charset="-127"/>
                 <a:ea typeface="한화고딕 L" panose="02020503020101020101" pitchFamily="18" charset="-127"/>
               </a:rPr>
-              <a:t>년 </a:t>
+              <a:t>날짜입력</a:t>
             </a:r>
             <a:r>
               <a:rPr lang="en-US" altLang="ko-KR" sz="1100" dirty="0">
@@ -3260,37 +3268,7 @@
                 <a:latin typeface="한화고딕 L" panose="02020503020101020101" pitchFamily="18" charset="-127"/>
                 <a:ea typeface="한화고딕 L" panose="02020503020101020101" pitchFamily="18" charset="-127"/>
               </a:rPr>
-              <a:t>12</a:t>
-            </a:r>
-            <a:r>
-              <a:rPr lang="ko-KR" altLang="en-US" sz="1100" dirty="0">
-                <a:solidFill>
-                  <a:srgbClr val="6C6A67"/>
-                </a:solidFill>
-                <a:latin typeface="한화고딕 L" panose="02020503020101020101" pitchFamily="18" charset="-127"/>
-                <a:ea typeface="한화고딕 L" panose="02020503020101020101" pitchFamily="18" charset="-127"/>
-              </a:rPr>
-              <a:t>월 </a:t>
-            </a:r>
-            <a:r>
-              <a:rPr lang="en-US" altLang="ko-KR" sz="1100" dirty="0">
-                <a:solidFill>
-                  <a:srgbClr val="6C6A67"/>
-                </a:solidFill>
-                <a:latin typeface="한화고딕 L" panose="02020503020101020101" pitchFamily="18" charset="-127"/>
-                <a:ea typeface="한화고딕 L" panose="02020503020101020101" pitchFamily="18" charset="-127"/>
-              </a:rPr>
-              <a:t>19</a:t>
-            </a:r>
-            <a:r>
-              <a:rPr lang="ko-KR" altLang="en-US" sz="1100" dirty="0">
-                <a:solidFill>
-                  <a:srgbClr val="6C6A67"/>
-                </a:solidFill>
-                <a:latin typeface="한화고딕 L" panose="02020503020101020101" pitchFamily="18" charset="-127"/>
-                <a:ea typeface="한화고딕 L" panose="02020503020101020101" pitchFamily="18" charset="-127"/>
-              </a:rPr>
-              <a:t>일</a:t>
+              <a:t>)</a:t>
             </a:r>
             <a:endParaRPr lang="ko-KR" altLang="en-US" sz="1100" dirty="0">
               <a:solidFill>
@@ -3311,7 +3289,7 @@
           <p:nvPr/>
         </p:nvPicPr>
         <p:blipFill rotWithShape="1">
-          <a:blip r:embed="rId2" cstate="print">
+          <a:blip r:embed="rId3" cstate="print">
             <a:extLst>
               <a:ext uri="{28A0092B-C50C-407E-A947-70E740481C1C}">
                 <a14:useLocalDpi xmlns:a14="http://schemas.microsoft.com/office/drawing/2010/main" val="0"/>
@@ -3365,7 +3343,7 @@
           <p:nvPr/>
         </p:nvPicPr>
         <p:blipFill rotWithShape="1">
-          <a:blip r:embed="rId3">
+          <a:blip r:embed="rId4">
             <a:extLst>
               <a:ext uri="{28A0092B-C50C-407E-A947-70E740481C1C}">
                 <a14:useLocalDpi xmlns:a14="http://schemas.microsoft.com/office/drawing/2010/main" val="0"/>
@@ -3419,7 +3397,7 @@
           <p:nvPr/>
         </p:nvPicPr>
         <p:blipFill rotWithShape="1">
-          <a:blip r:embed="rId4">
+          <a:blip r:embed="rId5">
             <a:extLst>
               <a:ext uri="{28A0092B-C50C-407E-A947-70E740481C1C}">
                 <a14:useLocalDpi xmlns:a14="http://schemas.microsoft.com/office/drawing/2010/main" val="0"/>
@@ -3473,7 +3451,7 @@
           <p:nvPr/>
         </p:nvPicPr>
         <p:blipFill rotWithShape="1">
-          <a:blip r:embed="rId5">
+          <a:blip r:embed="rId6">
             <a:extLst>
               <a:ext uri="{28A0092B-C50C-407E-A947-70E740481C1C}">
                 <a14:useLocalDpi xmlns:a14="http://schemas.microsoft.com/office/drawing/2010/main" val="0"/>
@@ -3518,120 +3496,203 @@
           </a:extLst>
         </p:spPr>
       </p:pic>
-      <p:sp>
-        <p:nvSpPr>
-          <p:cNvPr id="8" name="Google Shape;201;g375bbbb1663_0_21"/>
-          <p:cNvSpPr/>
+      <p:grpSp>
+        <p:nvGrpSpPr>
+          <p:cNvPr id="4" name="Group 3">
+            <a:extLst>
+              <a:ext uri="{FF2B5EF4-FFF2-40B4-BE49-F238E27FC236}">
+                <a16:creationId xmlns:a16="http://schemas.microsoft.com/office/drawing/2014/main" id="{61A9F312-DB75-4BE4-76E1-6BB4FEA6A37F}"/>
+              </a:ext>
+            </a:extLst>
+          </p:cNvPr>
+          <p:cNvGrpSpPr/>
           <p:nvPr/>
-        </p:nvSpPr>
-        <p:spPr>
+        </p:nvGrpSpPr>
+        <p:grpSpPr>
           <a:xfrm>
-            <a:off x="100965" y="7746365"/>
-            <a:ext cx="6668135" cy="2030730"/>
+            <a:off x="100674" y="7496995"/>
+            <a:ext cx="6668426" cy="2280100"/>
+            <a:chOff x="100674" y="7496995"/>
+            <a:chExt cx="6668426" cy="2280100"/>
           </a:xfrm>
-          <a:prstGeom prst="roundRect">
-            <a:avLst>
-              <a:gd name="adj" fmla="val 0"/>
-            </a:avLst>
-          </a:prstGeom>
-          <a:solidFill>
-            <a:schemeClr val="bg1"/>
-          </a:solidFill>
-          <a:ln w="9525" cap="flat" cmpd="sng">
+        </p:grpSpPr>
+        <p:sp>
+          <p:nvSpPr>
+            <p:cNvPr id="8" name="Google Shape;201;g375bbbb1663_0_21"/>
+            <p:cNvSpPr/>
+            <p:nvPr/>
+          </p:nvSpPr>
+          <p:spPr>
+            <a:xfrm>
+              <a:off x="100965" y="7746365"/>
+              <a:ext cx="6668135" cy="2030730"/>
+            </a:xfrm>
+            <a:prstGeom prst="roundRect">
+              <a:avLst>
+                <a:gd name="adj" fmla="val 0"/>
+              </a:avLst>
+            </a:prstGeom>
+            <a:solidFill>
+              <a:schemeClr val="bg1"/>
+            </a:solidFill>
+            <a:ln w="9525" cap="flat" cmpd="sng">
+              <a:solidFill>
+                <a:srgbClr val="EFEFEF"/>
+              </a:solidFill>
+              <a:prstDash val="solid"/>
+              <a:miter lim="800000"/>
+              <a:headEnd type="none" w="sm" len="sm"/>
+              <a:tailEnd type="none" w="sm" len="sm"/>
+            </a:ln>
+          </p:spPr>
+          <p:txBody>
+            <a:bodyPr spcFirstLastPara="1" wrap="square" lIns="91425" tIns="45700" rIns="91425" bIns="45700" anchor="ctr" anchorCtr="0">
+              <a:noAutofit/>
+            </a:bodyPr>
+            <a:lstStyle/>
+            <a:p>
+              <a:pPr marL="0" marR="0" lvl="0" indent="0" rtl="0">
+                <a:lnSpc>
+                  <a:spcPct val="120000"/>
+                </a:lnSpc>
+                <a:spcBef>
+                  <a:spcPts val="0"/>
+                </a:spcBef>
+                <a:spcAft>
+                  <a:spcPts val="0"/>
+                </a:spcAft>
+                <a:buClr>
+                  <a:srgbClr val="000000"/>
+                </a:buClr>
+                <a:buSzPts val="1800"/>
+                <a:buFont typeface="Arial" panose="020B0604020202020204"/>
+                <a:buNone/>
+              </a:pPr>
+              <a:r>
+                <a:rPr lang="en-US" sz="1200" b="0" i="0" u="none" strike="noStrike" cap="none" dirty="0">
+                  <a:solidFill>
+                    <a:schemeClr val="bg2">
+                      <a:lumMod val="90000"/>
+                    </a:schemeClr>
+                  </a:solidFill>
+                  <a:latin typeface="한화고딕 L" panose="02020503020101020101" pitchFamily="18" charset="-127"/>
+                  <a:ea typeface="한화고딕 L" panose="02020503020101020101" pitchFamily="18" charset="-127"/>
+                  <a:cs typeface="Arial" panose="020B0604020202020204"/>
+                  <a:sym typeface="Arial" panose="020B0604020202020204"/>
+                </a:rPr>
+                <a:t>AI Lab </a:t>
+              </a:r>
+              <a:r>
+                <a:rPr lang="ko-KR" altLang="en-US" sz="1200" b="0" i="0" u="none" strike="noStrike" cap="none" dirty="0">
+                  <a:solidFill>
+                    <a:schemeClr val="bg2">
+                      <a:lumMod val="90000"/>
+                    </a:schemeClr>
+                  </a:solidFill>
+                  <a:latin typeface="한화고딕 L" panose="02020503020101020101" pitchFamily="18" charset="-127"/>
+                  <a:ea typeface="한화고딕 L" panose="02020503020101020101" pitchFamily="18" charset="-127"/>
+                  <a:cs typeface="Arial" panose="020B0604020202020204"/>
+                  <a:sym typeface="Arial" panose="020B0604020202020204"/>
+                </a:rPr>
+                <a:t>내용 작성</a:t>
+              </a:r>
+              <a:endParaRPr sz="1200" b="0" i="0" u="none" strike="noStrike" cap="none" dirty="0">
+                <a:solidFill>
+                  <a:schemeClr val="bg2">
+                    <a:lumMod val="90000"/>
+                  </a:schemeClr>
+                </a:solidFill>
+                <a:latin typeface="한화고딕 L" panose="02020503020101020101" pitchFamily="18" charset="-127"/>
+                <a:ea typeface="한화고딕 L" panose="02020503020101020101" pitchFamily="18" charset="-127"/>
+                <a:cs typeface="Arial" panose="020B0604020202020204"/>
+                <a:sym typeface="Arial" panose="020B0604020202020204"/>
+              </a:endParaRPr>
+            </a:p>
+          </p:txBody>
+        </p:sp>
+        <p:sp>
+          <p:nvSpPr>
+            <p:cNvPr id="9" name="Google Shape;202;g375bbbb1663_0_21"/>
+            <p:cNvSpPr/>
+            <p:nvPr/>
+          </p:nvSpPr>
+          <p:spPr>
+            <a:xfrm>
+              <a:off x="100674" y="7496995"/>
+              <a:ext cx="1867451" cy="243157"/>
+            </a:xfrm>
+            <a:prstGeom prst="round2SameRect">
+              <a:avLst>
+                <a:gd name="adj1" fmla="val 17990"/>
+                <a:gd name="adj2" fmla="val 0"/>
+              </a:avLst>
+            </a:prstGeom>
             <a:solidFill>
               <a:srgbClr val="EFEFEF"/>
             </a:solidFill>
-            <a:prstDash val="solid"/>
-            <a:miter lim="800000"/>
-            <a:headEnd type="none" w="sm" len="sm"/>
-            <a:tailEnd type="none" w="sm" len="sm"/>
-          </a:ln>
-        </p:spPr>
-        <p:txBody>
-          <a:bodyPr spcFirstLastPara="1" wrap="square" lIns="91425" tIns="45700" rIns="91425" bIns="45700" anchor="ctr" anchorCtr="0">
-            <a:noAutofit/>
-          </a:bodyPr>
-          <a:lstStyle/>
-          <a:p>
-            <a:pPr marL="0" marR="0" lvl="0" indent="0" algn="ctr" rtl="0">
-              <a:lnSpc>
-                <a:spcPct val="120000"/>
-              </a:lnSpc>
-              <a:spcBef>
-                <a:spcPts val="0"/>
-              </a:spcBef>
-              <a:spcAft>
-                <a:spcPts val="0"/>
-              </a:spcAft>
-              <a:buClr>
-                <a:srgbClr val="000000"/>
-              </a:buClr>
-              <a:buSzPts val="1800"/>
-              <a:buFont typeface="Arial" panose="020B0604020202020204"/>
-              <a:buNone/>
-            </a:pPr>
-            <a:endParaRPr sz="1800" b="0" i="0" u="none" strike="noStrike" cap="none" dirty="0">
+            <a:ln>
               <a:solidFill>
-                <a:schemeClr val="bg2">
-                  <a:lumMod val="90000"/>
-                </a:schemeClr>
+                <a:srgbClr val="EFEFEF"/>
               </a:solidFill>
-              <a:latin typeface="Arial" panose="020B0604020202020204"/>
-              <a:ea typeface="Arial" panose="020B0604020202020204"/>
-              <a:cs typeface="Arial" panose="020B0604020202020204"/>
-              <a:sym typeface="Arial" panose="020B0604020202020204"/>
-            </a:endParaRPr>
-          </a:p>
-        </p:txBody>
-      </p:sp>
-      <p:sp>
-        <p:nvSpPr>
-          <p:cNvPr id="9" name="Google Shape;202;g375bbbb1663_0_21"/>
-          <p:cNvSpPr/>
-          <p:nvPr/>
-        </p:nvSpPr>
-        <p:spPr>
-          <a:xfrm>
-            <a:off x="100674" y="7496995"/>
-            <a:ext cx="1867451" cy="243157"/>
-          </a:xfrm>
-          <a:prstGeom prst="round2SameRect">
-            <a:avLst>
-              <a:gd name="adj1" fmla="val 17990"/>
-              <a:gd name="adj2" fmla="val 0"/>
-            </a:avLst>
-          </a:prstGeom>
-          <a:solidFill>
-            <a:srgbClr val="EFEFEF"/>
-          </a:solidFill>
-          <a:ln>
-            <a:solidFill>
-              <a:srgbClr val="EFEFEF"/>
-            </a:solidFill>
-          </a:ln>
-        </p:spPr>
-        <p:txBody>
-          <a:bodyPr spcFirstLastPara="1" wrap="square" lIns="91425" tIns="0" rIns="91425" bIns="0" anchor="ctr" anchorCtr="0">
-            <a:noAutofit/>
-          </a:bodyPr>
-          <a:lstStyle/>
-          <a:p>
-            <a:pPr marL="0" marR="0" lvl="0" indent="0" algn="ctr" rtl="0">
-              <a:spcBef>
-                <a:spcPts val="0"/>
-              </a:spcBef>
-              <a:spcAft>
-                <a:spcPts val="0"/>
-              </a:spcAft>
-              <a:buClr>
-                <a:srgbClr val="000000"/>
-              </a:buClr>
-              <a:buSzPts val="1400"/>
-              <a:buFont typeface="Arial" panose="020B0604020202020204"/>
-              <a:buNone/>
-            </a:pPr>
-            <a:r>
-              <a:rPr lang="en-US" sz="1400" i="0" u="none" strike="noStrike" cap="none" dirty="0">
+            </a:ln>
+          </p:spPr>
+          <p:txBody>
+            <a:bodyPr spcFirstLastPara="1" wrap="square" lIns="91425" tIns="0" rIns="91425" bIns="0" anchor="ctr" anchorCtr="0">
+              <a:noAutofit/>
+            </a:bodyPr>
+            <a:lstStyle/>
+            <a:p>
+              <a:pPr marL="0" marR="0" lvl="0" indent="0" algn="ctr" rtl="0">
+                <a:spcBef>
+                  <a:spcPts val="0"/>
+                </a:spcBef>
+                <a:spcAft>
+                  <a:spcPts val="0"/>
+                </a:spcAft>
+                <a:buClr>
+                  <a:srgbClr val="000000"/>
+                </a:buClr>
+                <a:buSzPts val="1400"/>
+                <a:buFont typeface="Arial" panose="020B0604020202020204"/>
+                <a:buNone/>
+              </a:pPr>
+              <a:r>
+                <a:rPr lang="en-US" sz="1400" i="0" u="none" strike="noStrike" cap="none" dirty="0">
+                  <a:solidFill>
+                    <a:srgbClr val="ED7100"/>
+                  </a:solidFill>
+                  <a:latin typeface="한화 R" panose="02020503020101020101" pitchFamily="18" charset="-127"/>
+                  <a:ea typeface="한화 R" panose="02020503020101020101" pitchFamily="18" charset="-127"/>
+                  <a:cs typeface="Times New Roman" panose="02020603050405020304"/>
+                  <a:sym typeface="Times New Roman" panose="02020603050405020304"/>
+                </a:rPr>
+                <a:t>AI</a:t>
+              </a:r>
+              <a:r>
+                <a:rPr lang="ko-KR" altLang="en-US" sz="1400" i="0" u="none" strike="noStrike" cap="none" dirty="0">
+                  <a:solidFill>
+                    <a:srgbClr val="ED7100"/>
+                  </a:solidFill>
+                  <a:latin typeface="한화 R" panose="02020503020101020101" pitchFamily="18" charset="-127"/>
+                  <a:ea typeface="한화 R" panose="02020503020101020101" pitchFamily="18" charset="-127"/>
+                  <a:cs typeface="Times New Roman" panose="02020603050405020304"/>
+                  <a:sym typeface="Times New Roman" panose="02020603050405020304"/>
+                </a:rPr>
+                <a:t> </a:t>
+              </a:r>
+              <a:r>
+                <a:rPr lang="en-US" altLang="ko-KR" sz="1400" i="0" u="none" strike="noStrike" cap="none" dirty="0">
+                  <a:solidFill>
+                    <a:srgbClr val="ED7100"/>
+                  </a:solidFill>
+                  <a:latin typeface="한화 R" panose="02020503020101020101" pitchFamily="18" charset="-127"/>
+                  <a:ea typeface="한화 R" panose="02020503020101020101" pitchFamily="18" charset="-127"/>
+                  <a:cs typeface="Times New Roman" panose="02020603050405020304"/>
+                  <a:sym typeface="Times New Roman" panose="02020603050405020304"/>
+                </a:rPr>
+                <a:t>Lab</a:t>
+              </a:r>
+              <a:endParaRPr sz="1600" i="0" u="none" strike="noStrike" cap="none" dirty="0">
                 <a:solidFill>
                   <a:srgbClr val="ED7100"/>
                 </a:solidFill>
@@ -3639,11 +3700,208 @@
                 <a:ea typeface="한화 R" panose="02020503020101020101" pitchFamily="18" charset="-127"/>
                 <a:cs typeface="Times New Roman" panose="02020603050405020304"/>
                 <a:sym typeface="Times New Roman" panose="02020603050405020304"/>
-              </a:rPr>
-              <a:t>AI</a:t>
-            </a:r>
-            <a:r>
-              <a:rPr lang="ko-KR" altLang="en-US" sz="1400" i="0" u="none" strike="noStrike" cap="none" dirty="0">
+              </a:endParaRPr>
+            </a:p>
+          </p:txBody>
+        </p:sp>
+      </p:grpSp>
+      <p:grpSp>
+        <p:nvGrpSpPr>
+          <p:cNvPr id="12" name="Group 11">
+            <a:extLst>
+              <a:ext uri="{FF2B5EF4-FFF2-40B4-BE49-F238E27FC236}">
+                <a16:creationId xmlns:a16="http://schemas.microsoft.com/office/drawing/2014/main" id="{4B0201A0-789B-B872-CEA9-CFFC71EFE97D}"/>
+              </a:ext>
+            </a:extLst>
+          </p:cNvPr>
+          <p:cNvGrpSpPr/>
+          <p:nvPr/>
+        </p:nvGrpSpPr>
+        <p:grpSpPr>
+          <a:xfrm>
+            <a:off x="94615" y="1062852"/>
+            <a:ext cx="6668135" cy="6319023"/>
+            <a:chOff x="94615" y="1062852"/>
+            <a:chExt cx="6668135" cy="6319023"/>
+          </a:xfrm>
+        </p:grpSpPr>
+        <p:sp>
+          <p:nvSpPr>
+            <p:cNvPr id="3" name="Google Shape;201;g375bbbb1663_0_21"/>
+            <p:cNvSpPr/>
+            <p:nvPr/>
+          </p:nvSpPr>
+          <p:spPr>
+            <a:xfrm>
+              <a:off x="94615" y="1311910"/>
+              <a:ext cx="6668135" cy="6069965"/>
+            </a:xfrm>
+            <a:prstGeom prst="roundRect">
+              <a:avLst>
+                <a:gd name="adj" fmla="val 0"/>
+              </a:avLst>
+            </a:prstGeom>
+            <a:solidFill>
+              <a:schemeClr val="bg1"/>
+            </a:solidFill>
+            <a:ln w="9525" cap="flat" cmpd="sng">
+              <a:solidFill>
+                <a:srgbClr val="EFEFEF"/>
+              </a:solidFill>
+              <a:prstDash val="solid"/>
+              <a:miter lim="800000"/>
+              <a:headEnd type="none" w="sm" len="sm"/>
+              <a:tailEnd type="none" w="sm" len="sm"/>
+            </a:ln>
+          </p:spPr>
+          <p:txBody>
+            <a:bodyPr spcFirstLastPara="1" wrap="square" lIns="91425" tIns="45700" rIns="91425" bIns="45700" anchor="ctr" anchorCtr="0">
+              <a:noAutofit/>
+            </a:bodyPr>
+            <a:lstStyle/>
+            <a:p>
+              <a:pPr marL="0" marR="0" lvl="0" indent="0" rtl="0">
+                <a:lnSpc>
+                  <a:spcPct val="120000"/>
+                </a:lnSpc>
+                <a:spcBef>
+                  <a:spcPts val="0"/>
+                </a:spcBef>
+                <a:spcAft>
+                  <a:spcPts val="0"/>
+                </a:spcAft>
+                <a:buClr>
+                  <a:srgbClr val="000000"/>
+                </a:buClr>
+                <a:buSzPts val="1800"/>
+                <a:buFont typeface="Arial" panose="020B0604020202020204"/>
+                <a:buNone/>
+              </a:pPr>
+              <a:r>
+                <a:rPr lang="en-US" sz="1200" b="0" i="0" u="none" strike="noStrike" cap="none" dirty="0">
+                  <a:solidFill>
+                    <a:schemeClr val="bg2">
+                      <a:lumMod val="90000"/>
+                    </a:schemeClr>
+                  </a:solidFill>
+                  <a:latin typeface="한화고딕 L" panose="02020503020101020101" pitchFamily="18" charset="-127"/>
+                  <a:ea typeface="한화고딕 L" panose="02020503020101020101" pitchFamily="18" charset="-127"/>
+                  <a:cs typeface="Arial" panose="020B0604020202020204"/>
+                  <a:sym typeface="Arial" panose="020B0604020202020204"/>
+                </a:rPr>
+                <a:t>AI </a:t>
+              </a:r>
+              <a:r>
+                <a:rPr lang="ko-KR" altLang="en-US" sz="1200" b="0" i="0" u="none" strike="noStrike" cap="none" dirty="0">
+                  <a:solidFill>
+                    <a:schemeClr val="bg2">
+                      <a:lumMod val="90000"/>
+                    </a:schemeClr>
+                  </a:solidFill>
+                  <a:latin typeface="한화고딕 L" panose="02020503020101020101" pitchFamily="18" charset="-127"/>
+                  <a:ea typeface="한화고딕 L" panose="02020503020101020101" pitchFamily="18" charset="-127"/>
+                  <a:cs typeface="Arial" panose="020B0604020202020204"/>
+                  <a:sym typeface="Arial" panose="020B0604020202020204"/>
+                </a:rPr>
+                <a:t>동향 내용 작성</a:t>
+              </a:r>
+              <a:endParaRPr sz="1200" b="0" i="0" u="none" strike="noStrike" cap="none" dirty="0">
+                <a:solidFill>
+                  <a:schemeClr val="bg2">
+                    <a:lumMod val="90000"/>
+                  </a:schemeClr>
+                </a:solidFill>
+                <a:latin typeface="한화고딕 L" panose="02020503020101020101" pitchFamily="18" charset="-127"/>
+                <a:ea typeface="한화고딕 L" panose="02020503020101020101" pitchFamily="18" charset="-127"/>
+                <a:cs typeface="Arial" panose="020B0604020202020204"/>
+                <a:sym typeface="Arial" panose="020B0604020202020204"/>
+              </a:endParaRPr>
+            </a:p>
+          </p:txBody>
+        </p:sp>
+        <p:sp>
+          <p:nvSpPr>
+            <p:cNvPr id="10" name="Google Shape;202;g375bbbb1663_0_21"/>
+            <p:cNvSpPr/>
+            <p:nvPr/>
+          </p:nvSpPr>
+          <p:spPr>
+            <a:xfrm>
+              <a:off x="94860" y="1062852"/>
+              <a:ext cx="1867451" cy="243157"/>
+            </a:xfrm>
+            <a:prstGeom prst="round2SameRect">
+              <a:avLst>
+                <a:gd name="adj1" fmla="val 17990"/>
+                <a:gd name="adj2" fmla="val 0"/>
+              </a:avLst>
+            </a:prstGeom>
+            <a:solidFill>
+              <a:srgbClr val="EFEFEF"/>
+            </a:solidFill>
+            <a:ln>
+              <a:solidFill>
+                <a:srgbClr val="EFEFEF"/>
+              </a:solidFill>
+            </a:ln>
+          </p:spPr>
+          <p:txBody>
+            <a:bodyPr spcFirstLastPara="1" wrap="square" lIns="91425" tIns="0" rIns="91425" bIns="0" anchor="ctr" anchorCtr="0">
+              <a:noAutofit/>
+            </a:bodyPr>
+            <a:lstStyle/>
+            <a:p>
+              <a:pPr marL="0" marR="0" lvl="0" indent="0" algn="ctr" rtl="0">
+                <a:spcBef>
+                  <a:spcPts val="0"/>
+                </a:spcBef>
+                <a:spcAft>
+                  <a:spcPts val="0"/>
+                </a:spcAft>
+                <a:buClr>
+                  <a:srgbClr val="000000"/>
+                </a:buClr>
+                <a:buSzPts val="1400"/>
+                <a:buFont typeface="Arial" panose="020B0604020202020204"/>
+                <a:buNone/>
+              </a:pPr>
+              <a:r>
+                <a:rPr lang="ko-KR" altLang="en-US" sz="1400" i="0" u="none" strike="noStrike" cap="none" dirty="0">
+                  <a:solidFill>
+                    <a:srgbClr val="ED7100"/>
+                  </a:solidFill>
+                  <a:latin typeface="한화 R" panose="02020503020101020101" pitchFamily="18" charset="-127"/>
+                  <a:ea typeface="한화 R" panose="02020503020101020101" pitchFamily="18" charset="-127"/>
+                  <a:cs typeface="Times New Roman" panose="02020603050405020304"/>
+                  <a:sym typeface="Times New Roman" panose="02020603050405020304"/>
+                </a:rPr>
+                <a:t>국내외 </a:t>
+              </a:r>
+              <a:r>
+                <a:rPr lang="en-US" altLang="ko-KR" sz="1400" i="0" u="none" strike="noStrike" cap="none" dirty="0">
+                  <a:solidFill>
+                    <a:srgbClr val="ED7100"/>
+                  </a:solidFill>
+                  <a:latin typeface="한화 R" panose="02020503020101020101" pitchFamily="18" charset="-127"/>
+                  <a:ea typeface="한화 R" panose="02020503020101020101" pitchFamily="18" charset="-127"/>
+                  <a:cs typeface="Times New Roman" panose="02020603050405020304"/>
+                  <a:sym typeface="Times New Roman" panose="02020603050405020304"/>
+                </a:rPr>
+                <a:t>AI </a:t>
+              </a:r>
+              <a:r>
+                <a:rPr lang="ko-KR" altLang="en-US" sz="1400" i="0" u="none" strike="noStrike" cap="none" dirty="0">
+                  <a:solidFill>
+                    <a:srgbClr val="ED7100"/>
+                  </a:solidFill>
+                  <a:latin typeface="한화 R" panose="02020503020101020101" pitchFamily="18" charset="-127"/>
+                  <a:ea typeface="한화 R" panose="02020503020101020101" pitchFamily="18" charset="-127"/>
+                  <a:cs typeface="Times New Roman" panose="02020603050405020304"/>
+                  <a:sym typeface="Times New Roman" panose="02020603050405020304"/>
+                </a:rPr>
+                <a:t>동향</a:t>
+              </a:r>
+              <a:endParaRPr sz="1600" i="0" u="none" strike="noStrike" cap="none" dirty="0">
                 <a:solidFill>
                   <a:srgbClr val="ED7100"/>
                 </a:solidFill>
@@ -3651,325 +3909,11 @@
                 <a:ea typeface="한화 R" panose="02020503020101020101" pitchFamily="18" charset="-127"/>
                 <a:cs typeface="Times New Roman" panose="02020603050405020304"/>
                 <a:sym typeface="Times New Roman" panose="02020603050405020304"/>
-              </a:rPr>
-              <a:t> </a:t>
-            </a:r>
-            <a:r>
-              <a:rPr lang="en-US" altLang="ko-KR" sz="1400" i="0" u="none" strike="noStrike" cap="none" dirty="0">
-                <a:solidFill>
-                  <a:srgbClr val="ED7100"/>
-                </a:solidFill>
-                <a:latin typeface="한화 R" panose="02020503020101020101" pitchFamily="18" charset="-127"/>
-                <a:ea typeface="한화 R" panose="02020503020101020101" pitchFamily="18" charset="-127"/>
-                <a:cs typeface="Times New Roman" panose="02020603050405020304"/>
-                <a:sym typeface="Times New Roman" panose="02020603050405020304"/>
-              </a:rPr>
-              <a:t>Lab</a:t>
-            </a:r>
-            <a:endParaRPr sz="1600" i="0" u="none" strike="noStrike" cap="none" dirty="0">
-              <a:solidFill>
-                <a:srgbClr val="ED7100"/>
-              </a:solidFill>
-              <a:latin typeface="한화 R" panose="02020503020101020101" pitchFamily="18" charset="-127"/>
-              <a:ea typeface="한화 R" panose="02020503020101020101" pitchFamily="18" charset="-127"/>
-              <a:cs typeface="Times New Roman" panose="02020603050405020304"/>
-              <a:sym typeface="Times New Roman" panose="02020603050405020304"/>
-            </a:endParaRPr>
-          </a:p>
-        </p:txBody>
-      </p:sp>
-      <p:sp>
-        <p:nvSpPr>
-          <p:cNvPr id="3" name="Google Shape;201;g375bbbb1663_0_21"/>
-          <p:cNvSpPr/>
-          <p:nvPr/>
-        </p:nvSpPr>
-        <p:spPr>
-          <a:xfrm>
-            <a:off x="94615" y="1311910"/>
-            <a:ext cx="6668135" cy="6069965"/>
-          </a:xfrm>
-          <a:prstGeom prst="roundRect">
-            <a:avLst>
-              <a:gd name="adj" fmla="val 0"/>
-            </a:avLst>
-          </a:prstGeom>
-          <a:solidFill>
-            <a:schemeClr val="bg1"/>
-          </a:solidFill>
-          <a:ln w="9525" cap="flat" cmpd="sng">
-            <a:solidFill>
-              <a:srgbClr val="EFEFEF"/>
-            </a:solidFill>
-            <a:prstDash val="solid"/>
-            <a:miter lim="800000"/>
-            <a:headEnd type="none" w="sm" len="sm"/>
-            <a:tailEnd type="none" w="sm" len="sm"/>
-          </a:ln>
-        </p:spPr>
-        <p:txBody>
-          <a:bodyPr spcFirstLastPara="1" wrap="square" lIns="91425" tIns="45700" rIns="91425" bIns="45700" anchor="ctr" anchorCtr="0">
-            <a:noAutofit/>
-          </a:bodyPr>
-          <a:lstStyle/>
-          <a:p>
-            <a:pPr marL="0" marR="0" lvl="0" indent="0" algn="ctr" rtl="0">
-              <a:lnSpc>
-                <a:spcPct val="120000"/>
-              </a:lnSpc>
-              <a:spcBef>
-                <a:spcPts val="0"/>
-              </a:spcBef>
-              <a:spcAft>
-                <a:spcPts val="0"/>
-              </a:spcAft>
-              <a:buClr>
-                <a:srgbClr val="000000"/>
-              </a:buClr>
-              <a:buSzPts val="1800"/>
-              <a:buFont typeface="Arial" panose="020B0604020202020204"/>
-              <a:buNone/>
-            </a:pPr>
-            <a:endParaRPr sz="1800" b="0" i="0" u="none" strike="noStrike" cap="none" dirty="0">
-              <a:solidFill>
-                <a:schemeClr val="bg2">
-                  <a:lumMod val="90000"/>
-                </a:schemeClr>
-              </a:solidFill>
-              <a:latin typeface="Arial" panose="020B0604020202020204"/>
-              <a:ea typeface="Arial" panose="020B0604020202020204"/>
-              <a:cs typeface="Arial" panose="020B0604020202020204"/>
-              <a:sym typeface="Arial" panose="020B0604020202020204"/>
-            </a:endParaRPr>
-          </a:p>
-        </p:txBody>
-      </p:sp>
-      <p:sp>
-        <p:nvSpPr>
-          <p:cNvPr id="10" name="Google Shape;202;g375bbbb1663_0_21"/>
-          <p:cNvSpPr/>
-          <p:nvPr/>
-        </p:nvSpPr>
-        <p:spPr>
-          <a:xfrm>
-            <a:off x="94860" y="1062852"/>
-            <a:ext cx="1867451" cy="243157"/>
-          </a:xfrm>
-          <a:prstGeom prst="round2SameRect">
-            <a:avLst>
-              <a:gd name="adj1" fmla="val 17990"/>
-              <a:gd name="adj2" fmla="val 0"/>
-            </a:avLst>
-          </a:prstGeom>
-          <a:solidFill>
-            <a:srgbClr val="EFEFEF"/>
-          </a:solidFill>
-          <a:ln>
-            <a:solidFill>
-              <a:srgbClr val="EFEFEF"/>
-            </a:solidFill>
-          </a:ln>
-        </p:spPr>
-        <p:txBody>
-          <a:bodyPr spcFirstLastPara="1" wrap="square" lIns="91425" tIns="0" rIns="91425" bIns="0" anchor="ctr" anchorCtr="0">
-            <a:noAutofit/>
-          </a:bodyPr>
-          <a:lstStyle/>
-          <a:p>
-            <a:pPr marL="0" marR="0" lvl="0" indent="0" algn="ctr" rtl="0">
-              <a:spcBef>
-                <a:spcPts val="0"/>
-              </a:spcBef>
-              <a:spcAft>
-                <a:spcPts val="0"/>
-              </a:spcAft>
-              <a:buClr>
-                <a:srgbClr val="000000"/>
-              </a:buClr>
-              <a:buSzPts val="1400"/>
-              <a:buFont typeface="Arial" panose="020B0604020202020204"/>
-              <a:buNone/>
-            </a:pPr>
-            <a:r>
-              <a:rPr lang="ko-KR" altLang="en-US" sz="1400" i="0" u="none" strike="noStrike" cap="none" dirty="0">
-                <a:solidFill>
-                  <a:srgbClr val="ED7100"/>
-                </a:solidFill>
-                <a:latin typeface="한화 R" panose="02020503020101020101" pitchFamily="18" charset="-127"/>
-                <a:ea typeface="한화 R" panose="02020503020101020101" pitchFamily="18" charset="-127"/>
-                <a:cs typeface="Times New Roman" panose="02020603050405020304"/>
-                <a:sym typeface="Times New Roman" panose="02020603050405020304"/>
-              </a:rPr>
-              <a:t>국내외 </a:t>
-            </a:r>
-            <a:r>
-              <a:rPr lang="en-US" altLang="ko-KR" sz="1400" i="0" u="none" strike="noStrike" cap="none" dirty="0">
-                <a:solidFill>
-                  <a:srgbClr val="ED7100"/>
-                </a:solidFill>
-                <a:latin typeface="한화 R" panose="02020503020101020101" pitchFamily="18" charset="-127"/>
-                <a:ea typeface="한화 R" panose="02020503020101020101" pitchFamily="18" charset="-127"/>
-                <a:cs typeface="Times New Roman" panose="02020603050405020304"/>
-                <a:sym typeface="Times New Roman" panose="02020603050405020304"/>
-              </a:rPr>
-              <a:t>AI </a:t>
-            </a:r>
-            <a:r>
-              <a:rPr lang="ko-KR" altLang="en-US" sz="1400" i="0" u="none" strike="noStrike" cap="none" dirty="0">
-                <a:solidFill>
-                  <a:srgbClr val="ED7100"/>
-                </a:solidFill>
-                <a:latin typeface="한화 R" panose="02020503020101020101" pitchFamily="18" charset="-127"/>
-                <a:ea typeface="한화 R" panose="02020503020101020101" pitchFamily="18" charset="-127"/>
-                <a:cs typeface="Times New Roman" panose="02020603050405020304"/>
-                <a:sym typeface="Times New Roman" panose="02020603050405020304"/>
-              </a:rPr>
-              <a:t>동향</a:t>
-            </a:r>
-            <a:endParaRPr sz="1600" i="0" u="none" strike="noStrike" cap="none" dirty="0">
-              <a:solidFill>
-                <a:srgbClr val="ED7100"/>
-              </a:solidFill>
-              <a:latin typeface="한화 R" panose="02020503020101020101" pitchFamily="18" charset="-127"/>
-              <a:ea typeface="한화 R" panose="02020503020101020101" pitchFamily="18" charset="-127"/>
-              <a:cs typeface="Times New Roman" panose="02020603050405020304"/>
-              <a:sym typeface="Times New Roman" panose="02020603050405020304"/>
-            </a:endParaRPr>
-          </a:p>
-        </p:txBody>
-      </p:sp>
-      <p:sp>
-        <p:nvSpPr>
-          <p:cNvPr id="11" name="TextBox 2"/>
-          <p:cNvSpPr txBox="1"/>
-          <p:nvPr/>
-        </p:nvSpPr>
-        <p:spPr>
-          <a:xfrm>
-            <a:off x="143510" y="1325589"/>
-            <a:ext cx="6668280" cy="312420"/>
-          </a:xfrm>
-          <a:prstGeom prst="rect">
-            <a:avLst/>
-          </a:prstGeom>
-          <a:noFill/>
-        </p:spPr>
-        <p:txBody>
-          <a:bodyPr wrap="square" rtlCol="0">
-            <a:spAutoFit/>
-          </a:bodyPr>
-          <a:lstStyle/>
-          <a:p>
-            <a:pPr marL="0" marR="0" lvl="0" indent="0" algn="l" defTabSz="457200" rtl="0" eaLnBrk="1" fontAlgn="auto" latinLnBrk="0" hangingPunct="1">
-              <a:lnSpc>
-                <a:spcPct val="120000"/>
-              </a:lnSpc>
-              <a:spcBef>
-                <a:spcPts val="0"/>
-              </a:spcBef>
-              <a:spcAft>
-                <a:spcPts val="0"/>
-              </a:spcAft>
-              <a:buClrTx/>
-              <a:buSzTx/>
-              <a:buFontTx/>
-              <a:buNone/>
-              <a:defRPr/>
-            </a:pPr>
-            <a:r>
-              <a:rPr kumimoji="0" lang="en-US" altLang="ko-KR" sz="1200" b="0" i="0" u="none" strike="noStrike" kern="1200" cap="none" spc="0" normalizeH="0" baseline="0" noProof="0" dirty="0">
-                <a:ln>
-                  <a:noFill/>
-                </a:ln>
-                <a:solidFill>
-                  <a:prstClr val="black"/>
-                </a:solidFill>
-                <a:effectLst/>
-                <a:uLnTx/>
-                <a:uFillTx/>
-                <a:latin typeface="한화고딕 B" panose="02020503020101020101" pitchFamily="18" charset="-127"/>
-                <a:ea typeface="한화고딕 B" panose="02020503020101020101" pitchFamily="18" charset="-127"/>
-                <a:cs typeface="+mn-cs"/>
-              </a:rPr>
-              <a:t>AI News</a:t>
-            </a:r>
-            <a:endParaRPr lang="en-US" altLang="ko-KR" sz="1200" u="sng" dirty="0">
-              <a:solidFill>
-                <a:prstClr val="black"/>
-              </a:solidFill>
-              <a:latin typeface="한화고딕 B" panose="02020503020101020101" pitchFamily="18" charset="-127"/>
-              <a:ea typeface="한화고딕 B" panose="02020503020101020101" pitchFamily="18" charset="-127"/>
-              <a:sym typeface="Wingdings" panose="05000000000000000000" pitchFamily="2" charset="2"/>
-            </a:endParaRPr>
-          </a:p>
-        </p:txBody>
-      </p:sp>
-      <p:sp>
-        <p:nvSpPr>
-          <p:cNvPr id="14" name="TextBox 2"/>
-          <p:cNvSpPr txBox="1"/>
-          <p:nvPr/>
-        </p:nvSpPr>
-        <p:spPr>
-          <a:xfrm>
-            <a:off x="152400" y="7756234"/>
-            <a:ext cx="6668280" cy="312420"/>
-          </a:xfrm>
-          <a:prstGeom prst="rect">
-            <a:avLst/>
-          </a:prstGeom>
-          <a:noFill/>
-        </p:spPr>
-        <p:txBody>
-          <a:bodyPr wrap="square" rtlCol="0">
-            <a:spAutoFit/>
-          </a:bodyPr>
-          <a:lstStyle/>
-          <a:p>
-            <a:pPr marL="0" marR="0" lvl="0" indent="0" algn="l" defTabSz="457200" rtl="0" eaLnBrk="1" fontAlgn="auto" latinLnBrk="0" hangingPunct="1">
-              <a:lnSpc>
-                <a:spcPct val="120000"/>
-              </a:lnSpc>
-              <a:spcBef>
-                <a:spcPts val="0"/>
-              </a:spcBef>
-              <a:spcAft>
-                <a:spcPts val="0"/>
-              </a:spcAft>
-              <a:buClrTx/>
-              <a:buSzTx/>
-              <a:buFontTx/>
-              <a:buNone/>
-              <a:defRPr/>
-            </a:pPr>
-            <a:r>
-              <a:rPr kumimoji="0" lang="en-US" altLang="ko-KR" sz="1200" b="0" i="0" u="none" strike="noStrike" kern="1200" cap="none" spc="0" normalizeH="0" baseline="0" noProof="0" dirty="0">
-                <a:ln>
-                  <a:noFill/>
-                </a:ln>
-                <a:solidFill>
-                  <a:prstClr val="black"/>
-                </a:solidFill>
-                <a:effectLst/>
-                <a:uLnTx/>
-                <a:uFillTx/>
-                <a:latin typeface="한화고딕 B" panose="02020503020101020101" pitchFamily="18" charset="-127"/>
-                <a:ea typeface="한화고딕 B" panose="02020503020101020101" pitchFamily="18" charset="-127"/>
-                <a:cs typeface="+mn-cs"/>
-              </a:rPr>
-              <a:t>AI LAB</a:t>
-            </a:r>
-            <a:endParaRPr lang="en-US" altLang="ko-KR" sz="1200" u="sng" dirty="0">
-              <a:solidFill>
-                <a:prstClr val="black"/>
-              </a:solidFill>
-              <a:latin typeface="한화고딕 B" panose="02020503020101020101" pitchFamily="18" charset="-127"/>
-              <a:ea typeface="한화고딕 B" panose="02020503020101020101" pitchFamily="18" charset="-127"/>
-              <a:sym typeface="Wingdings" panose="05000000000000000000" pitchFamily="2" charset="2"/>
-            </a:endParaRPr>
-          </a:p>
-        </p:txBody>
-      </p:sp>
+              </a:endParaRPr>
+            </a:p>
+          </p:txBody>
+        </p:sp>
+      </p:grpSp>
     </p:spTree>
   </p:cSld>
   <p:clrMapOvr>
@@ -4229,6 +4173,8 @@
       </a:bgFillStyleLst>
     </a:fmtScheme>
   </a:themeElements>
+  <a:objectDefaults/>
+  <a:extraClrSchemeLst/>
   <a:extLst>
     <a:ext uri="{05A4C25C-085E-4340-85A3-A5531E510DB2}">
       <thm15:themeFamily xmlns:thm15="http://schemas.microsoft.com/office/thememl/2012/main" name="Office Theme" id="{62F939B6-93AF-4DB8-9C6B-D6C7DFDC589F}" vid="{4A3C46E8-61CC-4603-A589-7422A47A8E4A}"/>
